--- a/apps/resources/bundled_files/6-klass-maalymat-diagramma-orto-maani-sabak.pptx
+++ b/apps/resources/bundled_files/6-klass-maalymat-diagramma-orto-maani-sabak.pptx
@@ -5196,7 +5196,7 @@
                 </a:solidFill>
                 <a:latin typeface="PT Sans"/>
               </a:rPr>
-              <a:t>6-класс · Математика</a:t>
+              <a:t/>
             </a:r>
           </a:p>
         </p:txBody>
@@ -5400,7 +5400,7 @@
                 </a:solidFill>
                 <a:latin typeface="PT Sans"/>
               </a:rPr>
-              <a:t>Китеп: Математика стандарты (2018), 6-класс: «Статистикалык маалыматтар»; Cambridge Primary 6 (маалымат чогултуу, диаграммалар, орточо). Мазмуну оригиналдуу.</a:t>
+              <a:t>Китеп: Математика стандарты (2018), 6-класс: «Статистикалык маалыматтар» (маалымат чогултуу, диаграммалар, орточо). Мазмуну оригиналдуу.</a:t>
             </a:r>
           </a:p>
         </p:txBody>
@@ -5688,7 +5688,7 @@
                 </a:solidFill>
                 <a:latin typeface="PT Sans"/>
               </a:rPr>
-              <a:t>6-класс ›</a:t>
+              <a:t/>
             </a:r>
           </a:p>
           <a:p>
@@ -6637,7 +6637,7 @@
                 </a:solidFill>
                 <a:latin typeface="PT Sans"/>
               </a:rPr>
-              <a:t>6-класс ›</a:t>
+              <a:t/>
             </a:r>
           </a:p>
           <a:p>
@@ -13732,7 +13732,7 @@
                 </a:solidFill>
                 <a:latin typeface="PT Sans"/>
               </a:rPr>
-              <a:t>6-класс ›</a:t>
+              <a:t/>
             </a:r>
           </a:p>
           <a:p>
@@ -16276,7 +16276,7 @@
                 </a:solidFill>
                 <a:latin typeface="PT Sans"/>
               </a:rPr>
-              <a:t>6-класс ›</a:t>
+              <a:t/>
             </a:r>
           </a:p>
           <a:p>
@@ -17859,7 +17859,7 @@
                 </a:solidFill>
                 <a:latin typeface="PT Sans"/>
               </a:rPr>
-              <a:t>6-класс ›</a:t>
+              <a:t/>
             </a:r>
           </a:p>
           <a:p>
@@ -18649,7 +18649,7 @@
                 </a:solidFill>
                 <a:latin typeface="PT Sans"/>
               </a:rPr>
-              <a:t>6-класс ›</a:t>
+              <a:t/>
             </a:r>
           </a:p>
           <a:p>
@@ -19400,7 +19400,7 @@
                 </a:solidFill>
                 <a:latin typeface="PT Sans"/>
               </a:rPr>
-              <a:t>6-класс ›</a:t>
+              <a:t/>
             </a:r>
           </a:p>
           <a:p>
@@ -21027,7 +21027,7 @@
                 </a:solidFill>
                 <a:latin typeface="PT Sans"/>
               </a:rPr>
-              <a:t>6-класс ›</a:t>
+              <a:t/>
             </a:r>
           </a:p>
           <a:p>
@@ -22111,7 +22111,7 @@
                 </a:solidFill>
                 <a:latin typeface="PT Sans"/>
               </a:rPr>
-              <a:t>6-класс ›</a:t>
+              <a:t/>
             </a:r>
           </a:p>
           <a:p>
@@ -23641,7 +23641,7 @@
                 </a:solidFill>
                 <a:latin typeface="PT Sans"/>
               </a:rPr>
-              <a:t>6-класс ›</a:t>
+              <a:t/>
             </a:r>
           </a:p>
           <a:p>
@@ -26068,7 +26068,7 @@
                 </a:solidFill>
                 <a:latin typeface="PT Sans"/>
               </a:rPr>
-              <a:t>6-класс ›</a:t>
+              <a:t/>
             </a:r>
           </a:p>
           <a:p>
@@ -27345,7 +27345,7 @@
                 </a:solidFill>
                 <a:latin typeface="PT Sans"/>
               </a:rPr>
-              <a:t>6-класс ›</a:t>
+              <a:t/>
             </a:r>
           </a:p>
           <a:p>
@@ -28773,7 +28773,7 @@
                 </a:solidFill>
                 <a:latin typeface="PT Sans"/>
               </a:rPr>
-              <a:t>6-класс ›</a:t>
+              <a:t/>
             </a:r>
           </a:p>
           <a:p>
@@ -30229,7 +30229,7 @@
                 </a:solidFill>
                 <a:latin typeface="PT Sans"/>
               </a:rPr>
-              <a:t>6-класс ›</a:t>
+              <a:t/>
             </a:r>
           </a:p>
           <a:p>
@@ -31848,7 +31848,7 @@
                 </a:solidFill>
                 <a:latin typeface="PT Sans"/>
               </a:rPr>
-              <a:t>6-класс ›</a:t>
+              <a:t/>
             </a:r>
           </a:p>
           <a:p>
@@ -32648,7 +32648,7 @@
                 </a:solidFill>
                 <a:latin typeface="PT Sans"/>
               </a:rPr>
-              <a:t>6-класс ›</a:t>
+              <a:t/>
             </a:r>
           </a:p>
           <a:p>
@@ -33489,7 +33489,7 @@
                 </a:solidFill>
                 <a:latin typeface="PT Sans"/>
               </a:rPr>
-              <a:t>6-класс ›</a:t>
+              <a:t/>
             </a:r>
           </a:p>
           <a:p>
@@ -34438,7 +34438,7 @@
                 </a:solidFill>
                 <a:latin typeface="PT Sans"/>
               </a:rPr>
-              <a:t>6-класс ›</a:t>
+              <a:t/>
             </a:r>
           </a:p>
           <a:p>
@@ -35892,7 +35892,7 @@
                 </a:solidFill>
                 <a:latin typeface="PT Sans"/>
               </a:rPr>
-              <a:t>6-класс ›</a:t>
+              <a:t/>
             </a:r>
           </a:p>
           <a:p>
@@ -36638,7 +36638,7 @@
                 </a:solidFill>
                 <a:latin typeface="PT Sans"/>
               </a:rPr>
-              <a:t>6-класс ›</a:t>
+              <a:t/>
             </a:r>
           </a:p>
           <a:p>
@@ -37446,7 +37446,7 @@
                 </a:solidFill>
                 <a:latin typeface="PT Sans"/>
               </a:rPr>
-              <a:t>6-класс ›</a:t>
+              <a:t/>
             </a:r>
           </a:p>
           <a:p>
@@ -38637,7 +38637,7 @@
                 </a:solidFill>
                 <a:latin typeface="PT Sans"/>
               </a:rPr>
-              <a:t>6-класс ›</a:t>
+              <a:t/>
             </a:r>
           </a:p>
           <a:p>
@@ -39832,7 +39832,7 @@
                 </a:solidFill>
                 <a:latin typeface="PT Sans"/>
               </a:rPr>
-              <a:t>6-класс ›</a:t>
+              <a:t/>
             </a:r>
           </a:p>
           <a:p>
@@ -40013,7 +40013,7 @@
                 </a:solidFill>
                 <a:latin typeface="PT Sans"/>
               </a:rPr>
-              <a:t>2–4-класс</a:t>
+              <a:t/>
             </a:r>
           </a:p>
         </p:txBody>
@@ -40193,7 +40193,7 @@
                 </a:solidFill>
                 <a:latin typeface="PT Sans"/>
               </a:rPr>
-              <a:t>5-класс</a:t>
+              <a:t/>
             </a:r>
           </a:p>
         </p:txBody>
@@ -40373,7 +40373,7 @@
                 </a:solidFill>
                 <a:latin typeface="PT Sans"/>
               </a:rPr>
-              <a:t>6-класс</a:t>
+              <a:t/>
             </a:r>
           </a:p>
         </p:txBody>
@@ -40609,7 +40609,7 @@
                 </a:solidFill>
                 <a:latin typeface="PT Sans"/>
               </a:rPr>
-              <a:t>7-класс</a:t>
+              <a:t/>
             </a:r>
           </a:p>
         </p:txBody>
@@ -41029,7 +41029,7 @@
                 </a:solidFill>
                 <a:latin typeface="PT Sans"/>
               </a:rPr>
-              <a:t>6-класс ›</a:t>
+              <a:t/>
             </a:r>
           </a:p>
           <a:p>
@@ -42177,7 +42177,7 @@
                 </a:solidFill>
                 <a:latin typeface="PT Sans"/>
               </a:rPr>
-              <a:t>6-класс ›</a:t>
+              <a:t/>
             </a:r>
           </a:p>
           <a:p>

--- a/apps/resources/bundled_files/6-klass-maalymat-diagramma-orto-maani-sabak.pptx
+++ b/apps/resources/bundled_files/6-klass-maalymat-diagramma-orto-maani-sabak.pptx
@@ -667,7 +667,7 @@
           <a:lstStyle/>
           <a:p>
             <a:r>
-              <a:t>Төрт өлчөм, бир маалымат. Медиана: 3, 4, 5, 6, 7, 11 – ортодо экөө (5 жана 6), ортосу 5,5. Мода жок: бир да маани кайталанбайт. Кулач: 11 − 3 = 8. Ката коддору: М1 (ортодогу сан), М2 (жыштык), М3 (эң чоңу), М4 (иреттебей).</a:t>
+              <a:t>Төрт өлчөм, бир маалымат. Медиана: 3, 4, 5, 6, 7, 11 – ортодо экөө (5 жана 6), ортосу 5,5. Мода жок: бир да маани кайталанбайт. Кулач: 11 − 3 = 8. Ката коддору: М1 (ортодогу сан), М2 (жыштык), М3 (эң чоңу), М4 (ирээттебей).</a:t>
             </a:r>
           </a:p>
         </p:txBody>
@@ -1582,7 +1582,7 @@
           <a:lstStyle/>
           <a:p>
             <a:r>
-              <a:t>Ой жүгүртүү маданияты (Wenxi Lee, 2.6).</a:t>
+              <a:t>Ой жүгүртүү маданияты (Wenxi Lee, 2,6).</a:t>
             </a:r>
           </a:p>
         </p:txBody>
@@ -16841,7 +16841,7 @@
                 </a:solidFill>
                 <a:latin typeface="PT Sans"/>
               </a:rPr>
-              <a:t>Иретте, ортодогусун ал</a:t>
+              <a:t>Ирээтте, ортодогусун ал</a:t>
             </a:r>
           </a:p>
         </p:txBody>
@@ -18157,7 +18157,7 @@
                 </a:solidFill>
                 <a:latin typeface="PT Sans"/>
               </a:rPr>
-              <a:t>иреттейбиз</a:t>
+              <a:t>ирээттейбиз</a:t>
             </a:r>
           </a:p>
         </p:txBody>
@@ -34803,7 +34803,7 @@
                 </a:solidFill>
                 <a:latin typeface="PT Sans"/>
               </a:rPr>
-              <a:t>Медиана: ар дайым адегенде иреттейбиз, карточкаларды тизип (М4).</a:t>
+              <a:t>Медиана: ар дайым адегенде ирээттейбиз, карточкаларды тизип (М4).</a:t>
             </a:r>
           </a:p>
         </p:txBody>
@@ -41582,7 +41582,7 @@
                 </a:solidFill>
                 <a:latin typeface="PT Sans"/>
               </a:rPr>
-              <a:t>Иретте: 9, 2, 7, 4</a:t>
+              <a:t>Ирээтте: 9, 2, 7, 4</a:t>
             </a:r>
           </a:p>
         </p:txBody>
@@ -42769,7 +42769,7 @@
                 </a:solidFill>
                 <a:latin typeface="PT Sans"/>
               </a:rPr>
-              <a:t>Иретте: 9, 2, 7, 4</a:t>
+              <a:t>Ирээтте: 9, 2, 7, 4</a:t>
             </a:r>
           </a:p>
         </p:txBody>
